--- a/POSTER_FINAL_PROJECT.pptx
+++ b/POSTER_FINAL_PROJECT.pptx
@@ -156,75 +156,6 @@
 </p:presentation>
 </file>
 
-<file path=ppt/changesInfos/changesInfo1.xml><?xml version="1.0" encoding="utf-8"?>
-<pc:chgInfo xmlns:a="http://schemas.openxmlformats.org/drawingml/2006/main" xmlns:r="http://schemas.openxmlformats.org/officeDocument/2006/relationships" xmlns:ac="http://schemas.microsoft.com/office/drawing/2013/main/command" xmlns:pc="http://schemas.microsoft.com/office/powerpoint/2013/main/command">
-  <pc:docChgLst>
-    <pc:chgData name="Will Wrenn" userId="f56d42fdb79696f3" providerId="LiveId" clId="{8848588F-0436-4B70-AC11-6831CFA9E1F4}"/>
-    <pc:docChg chg="undo custSel modSld">
-      <pc:chgData name="Will Wrenn" userId="f56d42fdb79696f3" providerId="LiveId" clId="{8848588F-0436-4B70-AC11-6831CFA9E1F4}" dt="2026-05-22T03:50:45.996" v="218" actId="1076"/>
-      <pc:docMkLst>
-        <pc:docMk/>
-      </pc:docMkLst>
-      <pc:sldChg chg="modSp mod">
-        <pc:chgData name="Will Wrenn" userId="f56d42fdb79696f3" providerId="LiveId" clId="{8848588F-0436-4B70-AC11-6831CFA9E1F4}" dt="2026-05-22T03:50:45.996" v="218" actId="1076"/>
-        <pc:sldMkLst>
-          <pc:docMk/>
-          <pc:sldMk cId="0" sldId="257"/>
-        </pc:sldMkLst>
-        <pc:spChg chg="mod">
-          <ac:chgData name="Will Wrenn" userId="f56d42fdb79696f3" providerId="LiveId" clId="{8848588F-0436-4B70-AC11-6831CFA9E1F4}" dt="2026-05-22T03:45:31.270" v="87" actId="20577"/>
-          <ac:spMkLst>
-            <pc:docMk/>
-            <pc:sldMk cId="0" sldId="257"/>
-            <ac:spMk id="3077" creationId="{00000000-0000-0000-0000-000000000000}"/>
-          </ac:spMkLst>
-        </pc:spChg>
-        <pc:spChg chg="mod">
-          <ac:chgData name="Will Wrenn" userId="f56d42fdb79696f3" providerId="LiveId" clId="{8848588F-0436-4B70-AC11-6831CFA9E1F4}" dt="2026-05-22T03:50:39.542" v="217" actId="14100"/>
-          <ac:spMkLst>
-            <pc:docMk/>
-            <pc:sldMk cId="0" sldId="257"/>
-            <ac:spMk id="3078" creationId="{00000000-0000-0000-0000-000000000000}"/>
-          </ac:spMkLst>
-        </pc:spChg>
-        <pc:picChg chg="mod">
-          <ac:chgData name="Will Wrenn" userId="f56d42fdb79696f3" providerId="LiveId" clId="{8848588F-0436-4B70-AC11-6831CFA9E1F4}" dt="2026-05-22T03:50:45.996" v="218" actId="1076"/>
-          <ac:picMkLst>
-            <pc:docMk/>
-            <pc:sldMk cId="0" sldId="257"/>
-            <ac:picMk id="2" creationId="{76D1EA5B-CF99-D65B-EDD5-2308B5AD507A}"/>
-          </ac:picMkLst>
-        </pc:picChg>
-        <pc:picChg chg="mod">
-          <ac:chgData name="Will Wrenn" userId="f56d42fdb79696f3" providerId="LiveId" clId="{8848588F-0436-4B70-AC11-6831CFA9E1F4}" dt="2026-05-22T03:50:31.885" v="215" actId="1076"/>
-          <ac:picMkLst>
-            <pc:docMk/>
-            <pc:sldMk cId="0" sldId="257"/>
-            <ac:picMk id="4" creationId="{0ADC6F1C-1FE4-7E21-A8A9-9BBEC67CC4BA}"/>
-          </ac:picMkLst>
-        </pc:picChg>
-        <pc:picChg chg="mod">
-          <ac:chgData name="Will Wrenn" userId="f56d42fdb79696f3" providerId="LiveId" clId="{8848588F-0436-4B70-AC11-6831CFA9E1F4}" dt="2026-05-22T03:50:31.885" v="215" actId="1076"/>
-          <ac:picMkLst>
-            <pc:docMk/>
-            <pc:sldMk cId="0" sldId="257"/>
-            <ac:picMk id="5" creationId="{F342C8AB-32FA-41B9-2D87-9D15EA12CCBF}"/>
-          </ac:picMkLst>
-        </pc:picChg>
-        <pc:picChg chg="mod modCrop">
-          <ac:chgData name="Will Wrenn" userId="f56d42fdb79696f3" providerId="LiveId" clId="{8848588F-0436-4B70-AC11-6831CFA9E1F4}" dt="2026-05-22T03:42:27.374" v="11" actId="29295"/>
-          <ac:picMkLst>
-            <pc:docMk/>
-            <pc:sldMk cId="0" sldId="257"/>
-            <ac:picMk id="12" creationId="{42AE917A-86DF-4743-F6DD-848631ABB240}"/>
-          </ac:picMkLst>
-        </pc:picChg>
-      </pc:sldChg>
-    </pc:docChg>
-  </pc:docChgLst>
-</pc:chgInfo>
-</file>
-
 <file path=ppt/notesMasters/notesMaster1.xml><?xml version="1.0" encoding="utf-8"?>
 <p:notesMaster xmlns:a="http://schemas.openxmlformats.org/drawingml/2006/main" xmlns:r="http://schemas.openxmlformats.org/officeDocument/2006/relationships" xmlns:p="http://schemas.openxmlformats.org/presentationml/2006/main">
   <p:cSld>
@@ -322,7 +253,7 @@
               <a:pPr>
                 <a:defRPr/>
               </a:pPr>
-              <a:t>5/22/2026</a:t>
+              <a:t>5/23/2026</a:t>
             </a:fld>
             <a:endParaRPr lang="en-US"/>
           </a:p>
@@ -922,7 +853,7 @@
               <a:pPr>
                 <a:defRPr/>
               </a:pPr>
-              <a:t>5/22/2026</a:t>
+              <a:t>5/23/2026</a:t>
             </a:fld>
             <a:endParaRPr lang="en-US"/>
           </a:p>
@@ -1728,14 +1659,14 @@
           </a:ln>
           <a:extLst>
             <a:ext uri="{909E8E84-426E-40dd-AFC4-6F175D3DCCD1}">
-              <a14:hiddenFill xmlns:a14="http://schemas.microsoft.com/office/drawing/2010/main" xmlns="">
+              <a14:hiddenFill xmlns="" xmlns:a14="http://schemas.microsoft.com/office/drawing/2010/main">
                 <a:solidFill>
                   <a:srgbClr val="FFFFFF"/>
                 </a:solidFill>
               </a14:hiddenFill>
             </a:ext>
             <a:ext uri="{91240B29-F687-4f45-9708-019B960494DF}">
-              <a14:hiddenLine xmlns:a14="http://schemas.microsoft.com/office/drawing/2010/main" xmlns="" w="9525">
+              <a14:hiddenLine xmlns="" xmlns:a14="http://schemas.microsoft.com/office/drawing/2010/main" w="9525">
                 <a:solidFill>
                   <a:srgbClr val="000000"/>
                 </a:solidFill>
@@ -1787,14 +1718,14 @@
           </a:ln>
           <a:extLst>
             <a:ext uri="{909E8E84-426E-40dd-AFC4-6F175D3DCCD1}">
-              <a14:hiddenFill xmlns:a14="http://schemas.microsoft.com/office/drawing/2010/main" xmlns="">
+              <a14:hiddenFill xmlns="" xmlns:a14="http://schemas.microsoft.com/office/drawing/2010/main">
                 <a:solidFill>
                   <a:srgbClr val="FFFFFF"/>
                 </a:solidFill>
               </a14:hiddenFill>
             </a:ext>
             <a:ext uri="{91240B29-F687-4f45-9708-019B960494DF}">
-              <a14:hiddenLine xmlns:a14="http://schemas.microsoft.com/office/drawing/2010/main" xmlns="" w="9525">
+              <a14:hiddenLine xmlns="" xmlns:a14="http://schemas.microsoft.com/office/drawing/2010/main" w="9525">
                 <a:solidFill>
                   <a:srgbClr val="000000"/>
                 </a:solidFill>
@@ -1894,7 +1825,7 @@
               <a:pPr>
                 <a:defRPr/>
               </a:pPr>
-              <a:t>5/22/2026</a:t>
+              <a:t>5/23/2026</a:t>
             </a:fld>
             <a:endParaRPr lang="en-US"/>
           </a:p>
@@ -2665,21 +2596,7 @@
                 <a:latin typeface="Helvetica Neue" charset="0"/>
                 <a:cs typeface="Helvetica Neue" charset="0"/>
               </a:rPr>
-              <a:t>William Wrenn and Blaise </a:t>
-            </a:r>
-            <a:r>
-              <a:rPr lang="en-US" dirty="0" err="1">
-                <a:latin typeface="Helvetica Neue" charset="0"/>
-                <a:cs typeface="Helvetica Neue" charset="0"/>
-              </a:rPr>
-              <a:t>Delforce</a:t>
-            </a:r>
-            <a:r>
-              <a:rPr lang="en-US" dirty="0">
-                <a:latin typeface="Helvetica Neue" charset="0"/>
-                <a:cs typeface="Helvetica Neue" charset="0"/>
-              </a:rPr>
-              <a:t> – Vermillion-Puck</a:t>
+              <a:t>William Wrenn and Blaise Delforce – Vermillion-Puck</a:t>
             </a:r>
           </a:p>
         </p:txBody>
@@ -2757,12 +2674,6 @@
             </a:endParaRPr>
           </a:p>
           <a:p>
-            <a:endParaRPr lang="en-US" sz="1200" b="1" dirty="0">
-              <a:latin typeface="Helvetica Neue" charset="0"/>
-              <a:cs typeface="Helvetica Neue" charset="0"/>
-            </a:endParaRPr>
-          </a:p>
-          <a:p>
             <a:r>
               <a:rPr lang="en-US" b="1" dirty="0">
                 <a:latin typeface="Helvetica Neue" charset="0"/>
@@ -2796,8 +2707,6 @@
               </a:rPr>
               <a:t>Time to closest approach correctly identifying conflict geometry</a:t>
             </a:r>
-          </a:p>
-          <a:p>
             <a:endParaRPr lang="en-US" sz="1200" b="1" dirty="0">
               <a:latin typeface="Helvetica Neue" charset="0"/>
               <a:cs typeface="Helvetica Neue" charset="0"/>
@@ -2837,8 +2746,6 @@
               </a:rPr>
               <a:t>Timestamp logging of collision received and cleared events</a:t>
             </a:r>
-          </a:p>
-          <a:p>
             <a:endParaRPr lang="en-US" sz="1200" b="1" dirty="0">
               <a:latin typeface="Helvetica Neue" charset="0"/>
               <a:cs typeface="Helvetica Neue" charset="0"/>
@@ -2878,8 +2785,6 @@
               </a:rPr>
               <a:t>Collision warning log display with timestamps.</a:t>
             </a:r>
-          </a:p>
-          <a:p>
             <a:endParaRPr lang="en-US" sz="1200" b="1" dirty="0">
               <a:latin typeface="Helvetica Neue" charset="0"/>
               <a:cs typeface="Helvetica Neue" charset="0"/>
@@ -2954,19 +2859,6 @@
                 <a:cs typeface="Helvetica Neue" charset="0"/>
               </a:rPr>
               <a:t>Background Image/Logo produced for this poster by Claude.ai</a:t>
-            </a:r>
-          </a:p>
-          <a:p>
-            <a:pPr marL="285750" indent="-285750">
-              <a:buFont typeface="Arial" panose="020B0604020202020204" pitchFamily="34" charset="0"/>
-              <a:buChar char="•"/>
-            </a:pPr>
-            <a:r>
-              <a:rPr lang="en-US" sz="1200" dirty="0">
-                <a:latin typeface="Helvetica Neue" charset="0"/>
-                <a:cs typeface="Helvetica Neue" charset="0"/>
-              </a:rPr>
-              <a:t>.</a:t>
             </a:r>
           </a:p>
           <a:p>
@@ -3113,7 +3005,7 @@
             </a:pPr>
             <a:r>
               <a:rPr lang="en-AU" sz="1200" dirty="0"/>
-              <a:t>Host PC</a:t>
+              <a:t>Host PCs (</a:t>
             </a:r>
           </a:p>
           <a:p>
@@ -3122,8 +3014,12 @@
               <a:buChar char="•"/>
             </a:pPr>
             <a:r>
-              <a:rPr lang="en-AU" sz="1200" dirty="0"/>
-              <a:t>SDR</a:t>
+              <a:rPr lang="en-AU" sz="1200" dirty="0">
+                <a:solidFill>
+                  <a:srgbClr val="7030A0"/>
+                </a:solidFill>
+              </a:rPr>
+              <a:t>ADS-B Filter and RTLSDR/Stub Antennae</a:t>
             </a:r>
           </a:p>
           <a:p>
@@ -3133,8 +3029,33 @@
             </a:pPr>
             <a:r>
               <a:rPr lang="en-AU" sz="1200" dirty="0"/>
-              <a:t>two nRF52840 boards</a:t>
-            </a:r>
+              <a:t>nRF52840 boards (2) (</a:t>
+            </a:r>
+            <a:r>
+              <a:rPr lang="en-AU" sz="1200" i="1" dirty="0">
+                <a:solidFill>
+                  <a:schemeClr val="accent6"/>
+                </a:solidFill>
+              </a:rPr>
+              <a:t>Controller</a:t>
+            </a:r>
+            <a:r>
+              <a:rPr lang="en-AU" sz="1200" i="1" dirty="0"/>
+              <a:t> &amp; </a:t>
+            </a:r>
+            <a:r>
+              <a:rPr lang="en-AU" sz="1200" i="1" dirty="0">
+                <a:solidFill>
+                  <a:schemeClr val="accent4"/>
+                </a:solidFill>
+              </a:rPr>
+              <a:t>Sim</a:t>
+            </a:r>
+            <a:r>
+              <a:rPr lang="en-AU" sz="1200" dirty="0"/>
+              <a:t>)</a:t>
+            </a:r>
+            <a:endParaRPr lang="en-AU" sz="1600" dirty="0"/>
           </a:p>
           <a:p>
             <a:pPr marL="171450" indent="-171450">
@@ -3145,28 +3066,32 @@
               <a:rPr lang="en-AU" sz="1200" dirty="0"/>
               <a:t>Piezo buzzer</a:t>
             </a:r>
-            <a:endParaRPr lang="en-US" b="1" dirty="0">
-              <a:latin typeface="Helvetica Neue" charset="0"/>
-              <a:cs typeface="Helvetica Neue" charset="0"/>
-            </a:endParaRPr>
-          </a:p>
-          <a:p>
-            <a:r>
-              <a:rPr lang="en-US" b="1" dirty="0">
-                <a:latin typeface="Helvetica Neue" charset="0"/>
-                <a:cs typeface="Helvetica Neue" charset="0"/>
-              </a:rPr>
-              <a:t>System Software</a:t>
-            </a:r>
-          </a:p>
-          <a:p>
-            <a:pPr marL="171450" indent="-171450">
-              <a:buFont typeface="Arial" panose="020B0604020202020204" pitchFamily="34" charset="0"/>
-              <a:buChar char="•"/>
-            </a:pPr>
-            <a:r>
-              <a:rPr lang="en-AU" sz="1200" dirty="0"/>
-              <a:t>Dump1090</a:t>
+            <a:endParaRPr lang="en-AU" sz="1200" b="1" dirty="0">
+              <a:latin typeface="Helvetica Neue" charset="0"/>
+              <a:cs typeface="Helvetica Neue" charset="0"/>
+            </a:endParaRPr>
+          </a:p>
+          <a:p>
+            <a:r>
+              <a:rPr lang="en-US" sz="1200" b="1" dirty="0">
+                <a:latin typeface="Helvetica Neue" charset="0"/>
+                <a:cs typeface="Helvetica Neue" charset="0"/>
+              </a:rPr>
+              <a:t>System </a:t>
+            </a:r>
+            <a:r>
+              <a:rPr lang="en-US" sz="1200" b="1" dirty="0" err="1">
+                <a:latin typeface="Helvetica Neue" charset="0"/>
+                <a:cs typeface="Helvetica Neue" charset="0"/>
+              </a:rPr>
+              <a:t>Visualisation</a:t>
+            </a:r>
+            <a:r>
+              <a:rPr lang="en-US" sz="1200" b="1" dirty="0">
+                <a:latin typeface="Helvetica Neue" charset="0"/>
+                <a:cs typeface="Helvetica Neue" charset="0"/>
+              </a:rPr>
+              <a:t> Software</a:t>
             </a:r>
           </a:p>
           <a:p>
@@ -3180,7 +3105,7 @@
                   <a:srgbClr val="FF0000"/>
                 </a:solidFill>
               </a:rPr>
-              <a:t>Python Flight Controller GUI</a:t>
+              <a:t>Python Flight Sim GUI</a:t>
             </a:r>
           </a:p>
           <a:p>
@@ -3203,21 +3128,12 @@
               <a:buChar char="•"/>
             </a:pPr>
             <a:r>
-              <a:rPr lang="en-AU" sz="1200" dirty="0"/>
-              <a:t>MQTT web dashboard</a:t>
-            </a:r>
-            <a:endParaRPr lang="en-US" b="1" dirty="0">
-              <a:latin typeface="Helvetica Neue" charset="0"/>
-              <a:cs typeface="Helvetica Neue" charset="0"/>
-            </a:endParaRPr>
-          </a:p>
-          <a:p>
-            <a:r>
-              <a:rPr lang="en-US" b="1" dirty="0">
-                <a:latin typeface="Helvetica Neue" charset="0"/>
-                <a:cs typeface="Helvetica Neue" charset="0"/>
-              </a:rPr>
-              <a:t>System Firmware</a:t>
+              <a:rPr lang="en-AU" sz="1200" dirty="0">
+                <a:solidFill>
+                  <a:srgbClr val="FFC000"/>
+                </a:solidFill>
+              </a:rPr>
+              <a:t>MQTT Web dashboard</a:t>
             </a:r>
           </a:p>
           <a:p>
@@ -3226,40 +3142,273 @@
               <a:buChar char="•"/>
             </a:pPr>
             <a:r>
-              <a:rPr lang="en-AU" sz="1200" dirty="0"/>
-              <a:t>Zephyr RTOS on both nRF52840 boards. BLE GATT</a:t>
-            </a:r>
-          </a:p>
-          <a:p>
-            <a:pPr marL="171450" indent="-171450">
+              <a:rPr lang="en-AU" sz="1200" b="1" dirty="0">
+                <a:solidFill>
+                  <a:srgbClr val="7030A0"/>
+                </a:solidFill>
+                <a:latin typeface="Helvetica Neue" charset="0"/>
+                <a:cs typeface="Helvetica Neue" charset="0"/>
+              </a:rPr>
+              <a:t>Dump1090 Software</a:t>
+            </a:r>
+          </a:p>
+          <a:p>
+            <a:r>
+              <a:rPr lang="en-US" b="1" dirty="0">
+                <a:latin typeface="Helvetica Neue" charset="0"/>
+                <a:cs typeface="Helvetica Neue" charset="0"/>
+              </a:rPr>
+              <a:t>System Networking</a:t>
+            </a:r>
+          </a:p>
+          <a:p>
+            <a:pPr marL="285750" indent="-285750">
               <a:buFont typeface="Arial" panose="020B0604020202020204" pitchFamily="34" charset="0"/>
               <a:buChar char="•"/>
             </a:pPr>
             <a:r>
-              <a:rPr lang="en-AU" sz="1200" dirty="0"/>
-              <a:t>Aircraft DB</a:t>
-            </a:r>
-          </a:p>
-          <a:p>
-            <a:pPr marL="171450" indent="-171450">
+              <a:rPr lang="en-US" sz="1200" dirty="0">
+                <a:solidFill>
+                  <a:schemeClr val="accent3">
+                    <a:lumMod val="75000"/>
+                  </a:schemeClr>
+                </a:solidFill>
+                <a:latin typeface="Helvetica Neue" charset="0"/>
+                <a:cs typeface="Helvetica Neue" charset="0"/>
+              </a:rPr>
+              <a:t>USB-CDC ACM Serial (Node-PC)</a:t>
+            </a:r>
+          </a:p>
+          <a:p>
+            <a:pPr marL="285750" indent="-285750">
               <a:buFont typeface="Arial" panose="020B0604020202020204" pitchFamily="34" charset="0"/>
               <a:buChar char="•"/>
             </a:pPr>
             <a:r>
-              <a:rPr lang="en-AU" sz="1200" dirty="0"/>
-              <a:t>Kalman filter for collision predictor</a:t>
-            </a:r>
-          </a:p>
-          <a:p>
-            <a:pPr marL="171450" indent="-171450">
+              <a:rPr lang="en-US" sz="1200" dirty="0">
+                <a:solidFill>
+                  <a:srgbClr val="FF0000"/>
+                </a:solidFill>
+                <a:latin typeface="Helvetica Neue" charset="0"/>
+                <a:cs typeface="Helvetica Neue" charset="0"/>
+              </a:rPr>
+              <a:t>BLE GATT (Node-Node)</a:t>
+            </a:r>
+          </a:p>
+          <a:p>
+            <a:pPr marL="285750" indent="-285750">
               <a:buFont typeface="Arial" panose="020B0604020202020204" pitchFamily="34" charset="0"/>
               <a:buChar char="•"/>
             </a:pPr>
             <a:r>
-              <a:rPr lang="en-AU" sz="1200" dirty="0"/>
-              <a:t>SON parser for GUIs</a:t>
-            </a:r>
-            <a:endParaRPr lang="en-US" sz="1200" dirty="0">
+              <a:rPr lang="en-US" sz="1200" dirty="0">
+                <a:solidFill>
+                  <a:schemeClr val="tx1">
+                    <a:lumMod val="50000"/>
+                    <a:lumOff val="50000"/>
+                  </a:schemeClr>
+                </a:solidFill>
+                <a:latin typeface="Helvetica Neue" charset="0"/>
+                <a:cs typeface="Helvetica Neue" charset="0"/>
+              </a:rPr>
+              <a:t>MQTT + </a:t>
+            </a:r>
+            <a:r>
+              <a:rPr lang="en-US" sz="1200" b="1" dirty="0">
+                <a:solidFill>
+                  <a:schemeClr val="tx1">
+                    <a:lumMod val="50000"/>
+                    <a:lumOff val="50000"/>
+                  </a:schemeClr>
+                </a:solidFill>
+                <a:latin typeface="Helvetica Neue" charset="0"/>
+                <a:cs typeface="Helvetica Neue" charset="0"/>
+              </a:rPr>
+              <a:t>HTTPS</a:t>
+            </a:r>
+            <a:r>
+              <a:rPr lang="en-US" sz="1200" dirty="0">
+                <a:solidFill>
+                  <a:schemeClr val="tx1">
+                    <a:lumMod val="50000"/>
+                    <a:lumOff val="50000"/>
+                  </a:schemeClr>
+                </a:solidFill>
+                <a:latin typeface="Helvetica Neue" charset="0"/>
+                <a:cs typeface="Helvetica Neue" charset="0"/>
+              </a:rPr>
+              <a:t> REST (Dashboard)</a:t>
+            </a:r>
+          </a:p>
+          <a:p>
+            <a:pPr marL="285750" indent="-285750">
+              <a:buFont typeface="Arial" panose="020B0604020202020204" pitchFamily="34" charset="0"/>
+              <a:buChar char="•"/>
+            </a:pPr>
+            <a:r>
+              <a:rPr lang="en-US" sz="1200" dirty="0">
+                <a:solidFill>
+                  <a:schemeClr val="accent4">
+                    <a:lumMod val="75000"/>
+                  </a:schemeClr>
+                </a:solidFill>
+                <a:latin typeface="Helvetica Neue" charset="0"/>
+                <a:cs typeface="Helvetica Neue" charset="0"/>
+              </a:rPr>
+              <a:t>Dump1090 HTTPS Polling</a:t>
+            </a:r>
+          </a:p>
+          <a:p>
+            <a:r>
+              <a:rPr lang="en-US" b="1" dirty="0">
+                <a:latin typeface="Helvetica Neue" charset="0"/>
+                <a:cs typeface="Helvetica Neue" charset="0"/>
+              </a:rPr>
+              <a:t>System Algorithms</a:t>
+            </a:r>
+          </a:p>
+          <a:p>
+            <a:pPr marL="285750" indent="-285750">
+              <a:buFont typeface="Arial" panose="020B0604020202020204" pitchFamily="34" charset="0"/>
+              <a:buChar char="•"/>
+            </a:pPr>
+            <a:r>
+              <a:rPr lang="en-US" sz="1200" dirty="0">
+                <a:latin typeface="Helvetica Neue" charset="0"/>
+                <a:cs typeface="Helvetica Neue" charset="0"/>
+              </a:rPr>
+              <a:t>Kalman </a:t>
+            </a:r>
+            <a:r>
+              <a:rPr lang="en-US" sz="1200" dirty="0" err="1">
+                <a:latin typeface="Helvetica Neue" charset="0"/>
+                <a:cs typeface="Helvetica Neue" charset="0"/>
+              </a:rPr>
+              <a:t>Localisation</a:t>
+            </a:r>
+            <a:r>
+              <a:rPr lang="en-US" sz="1200" dirty="0">
+                <a:latin typeface="Helvetica Neue" charset="0"/>
+                <a:cs typeface="Helvetica Neue" charset="0"/>
+              </a:rPr>
+              <a:t>/Tracking</a:t>
+            </a:r>
+          </a:p>
+          <a:p>
+            <a:pPr marL="285750" indent="-285750">
+              <a:buFont typeface="Arial" panose="020B0604020202020204" pitchFamily="34" charset="0"/>
+              <a:buChar char="•"/>
+            </a:pPr>
+            <a:r>
+              <a:rPr lang="en-US" sz="1200" dirty="0">
+                <a:latin typeface="Helvetica Neue" charset="0"/>
+                <a:cs typeface="Helvetica Neue" charset="0"/>
+              </a:rPr>
+              <a:t>Sensor Data Fusion (BLE/SDR)</a:t>
+            </a:r>
+          </a:p>
+          <a:p>
+            <a:pPr marL="285750" indent="-285750">
+              <a:buFont typeface="Arial" panose="020B0604020202020204" pitchFamily="34" charset="0"/>
+              <a:buChar char="•"/>
+            </a:pPr>
+            <a:r>
+              <a:rPr lang="en-US" sz="1200" dirty="0">
+                <a:latin typeface="Helvetica Neue" charset="0"/>
+                <a:cs typeface="Helvetica Neue" charset="0"/>
+              </a:rPr>
+              <a:t>IoT (MQTT/HTTPS REST)</a:t>
+            </a:r>
+          </a:p>
+          <a:p>
+            <a:pPr marL="285750" indent="-285750">
+              <a:buFont typeface="Arial" panose="020B0604020202020204" pitchFamily="34" charset="0"/>
+              <a:buChar char="•"/>
+            </a:pPr>
+            <a:r>
+              <a:rPr lang="en-US" sz="1200" dirty="0">
+                <a:latin typeface="Helvetica Neue" charset="0"/>
+                <a:cs typeface="Helvetica Neue" charset="0"/>
+              </a:rPr>
+              <a:t>Geometric Collision Detection</a:t>
+            </a:r>
+          </a:p>
+          <a:p>
+            <a:r>
+              <a:rPr lang="en-US" b="1" dirty="0">
+                <a:latin typeface="Helvetica Neue" charset="0"/>
+                <a:cs typeface="Helvetica Neue" charset="0"/>
+              </a:rPr>
+              <a:t>System Firmware:</a:t>
+            </a:r>
+          </a:p>
+          <a:p>
+            <a:pPr marL="285750" indent="-285750">
+              <a:buFont typeface="Arial" panose="020B0604020202020204" pitchFamily="34" charset="0"/>
+              <a:buChar char="•"/>
+            </a:pPr>
+            <a:r>
+              <a:rPr lang="en-US" sz="1200" dirty="0">
+                <a:latin typeface="Helvetica Neue" charset="0"/>
+                <a:cs typeface="Helvetica Neue" charset="0"/>
+              </a:rPr>
+              <a:t>Kernel Mutex/Spinlock/threads for sharing and parallel computing</a:t>
+            </a:r>
+          </a:p>
+          <a:p>
+            <a:pPr marL="285750" indent="-285750">
+              <a:buFont typeface="Arial" panose="020B0604020202020204" pitchFamily="34" charset="0"/>
+              <a:buChar char="•"/>
+            </a:pPr>
+            <a:r>
+              <a:rPr lang="en-US" sz="1200" dirty="0">
+                <a:latin typeface="Helvetica Neue" charset="0"/>
+                <a:cs typeface="Helvetica Neue" charset="0"/>
+              </a:rPr>
+              <a:t>BLE Host Stack</a:t>
+            </a:r>
+          </a:p>
+          <a:p>
+            <a:pPr marL="285750" indent="-285750">
+              <a:buFont typeface="Arial" panose="020B0604020202020204" pitchFamily="34" charset="0"/>
+              <a:buChar char="•"/>
+            </a:pPr>
+            <a:r>
+              <a:rPr lang="en-US" sz="1200" dirty="0">
+                <a:latin typeface="Helvetica Neue" charset="0"/>
+                <a:cs typeface="Helvetica Neue" charset="0"/>
+              </a:rPr>
+              <a:t>Stack Overflow protection</a:t>
+            </a:r>
+          </a:p>
+          <a:p>
+            <a:pPr marL="285750" indent="-285750">
+              <a:buFont typeface="Arial" panose="020B0604020202020204" pitchFamily="34" charset="0"/>
+              <a:buChar char="•"/>
+            </a:pPr>
+            <a:r>
+              <a:rPr lang="en-US" sz="1200" dirty="0">
+                <a:latin typeface="Helvetica Neue" charset="0"/>
+                <a:cs typeface="Helvetica Neue" charset="0"/>
+              </a:rPr>
+              <a:t>USB CDC ACM Dual Interface</a:t>
+            </a:r>
+          </a:p>
+          <a:p>
+            <a:pPr marL="285750" indent="-285750">
+              <a:buFont typeface="Arial" panose="020B0604020202020204" pitchFamily="34" charset="0"/>
+              <a:buChar char="•"/>
+            </a:pPr>
+            <a:r>
+              <a:rPr lang="en-US" sz="1200" dirty="0">
+                <a:latin typeface="Helvetica Neue" charset="0"/>
+                <a:cs typeface="Helvetica Neue" charset="0"/>
+              </a:rPr>
+              <a:t>JSON Parsing</a:t>
+            </a:r>
+          </a:p>
+          <a:p>
+            <a:endParaRPr lang="en-US" b="1" dirty="0">
               <a:latin typeface="Helvetica Neue" charset="0"/>
               <a:cs typeface="Helvetica Neue" charset="0"/>
             </a:endParaRPr>
@@ -3515,41 +3664,6 @@
       </p:sp>
       <p:pic>
         <p:nvPicPr>
-          <p:cNvPr id="2" name="Picture 1" descr="image">
-            <a:extLst>
-              <a:ext uri="{FF2B5EF4-FFF2-40B4-BE49-F238E27FC236}">
-                <a16:creationId xmlns:a16="http://schemas.microsoft.com/office/drawing/2014/main" id="{76D1EA5B-CF99-D65B-EDD5-2308B5AD507A}"/>
-              </a:ext>
-            </a:extLst>
-          </p:cNvPr>
-          <p:cNvPicPr>
-            <a:picLocks noChangeAspect="1"/>
-          </p:cNvPicPr>
-          <p:nvPr/>
-        </p:nvPicPr>
-        <p:blipFill>
-          <a:blip r:embed="rId4"/>
-          <a:stretch>
-            <a:fillRect/>
-          </a:stretch>
-        </p:blipFill>
-        <p:spPr>
-          <a:xfrm>
-            <a:off x="7783513" y="5704840"/>
-            <a:ext cx="6484937" cy="4443965"/>
-          </a:xfrm>
-          <a:prstGeom prst="rect">
-            <a:avLst/>
-          </a:prstGeom>
-          <a:ln w="28575">
-            <a:solidFill>
-              <a:schemeClr val="tx1"/>
-            </a:solidFill>
-          </a:ln>
-        </p:spPr>
-      </p:pic>
-      <p:pic>
-        <p:nvPicPr>
           <p:cNvPr id="4" name="Picture 3" descr="The image displays a map with a route from Samford Village to Brisbane Airport, marked with specific latitude and longitude coordinates.&#10;&#10;AI-generated content may be incorrect.">
             <a:extLst>
               <a:ext uri="{FF2B5EF4-FFF2-40B4-BE49-F238E27FC236}">
@@ -3563,7 +3677,7 @@
           <p:nvPr/>
         </p:nvPicPr>
         <p:blipFill>
-          <a:blip r:embed="rId5"/>
+          <a:blip r:embed="rId4"/>
           <a:stretch>
             <a:fillRect/>
           </a:stretch>
@@ -3585,10 +3699,10 @@
       </p:pic>
       <p:pic>
         <p:nvPicPr>
-          <p:cNvPr id="5" name="Picture 4" descr="The image displays a map with a route from Samford Village to Brisbane Airport, marked with specific latitude and longitude coordinates.&#10;&#10;AI-generated content may be incorrect.">
+          <p:cNvPr id="14" name="Picture 13" descr="SW&#10;&#10;AI-generated content may be incorrect.">
             <a:extLst>
               <a:ext uri="{FF2B5EF4-FFF2-40B4-BE49-F238E27FC236}">
-                <a16:creationId xmlns:a16="http://schemas.microsoft.com/office/drawing/2014/main" id="{F342C8AB-32FA-41B9-2D87-9D15EA12CCBF}"/>
+                <a16:creationId xmlns:a16="http://schemas.microsoft.com/office/drawing/2014/main" id="{A980F6F2-E1AC-8D2F-500D-EB422D3CBC35}"/>
               </a:ext>
             </a:extLst>
           </p:cNvPr>
@@ -3605,25 +3719,20 @@
         </p:blipFill>
         <p:spPr>
           <a:xfrm>
-            <a:off x="10765631" y="3458947"/>
-            <a:ext cx="3705225" cy="2131727"/>
+            <a:off x="23813" y="68727"/>
+            <a:ext cx="1056690" cy="970680"/>
           </a:xfrm>
           <a:prstGeom prst="rect">
             <a:avLst/>
           </a:prstGeom>
-          <a:ln w="38100">
-            <a:solidFill>
-              <a:schemeClr val="accent3"/>
-            </a:solidFill>
-          </a:ln>
         </p:spPr>
       </p:pic>
       <p:pic>
         <p:nvPicPr>
-          <p:cNvPr id="14" name="Picture 13" descr="SW&#10;&#10;AI-generated content may be incorrect.">
+          <p:cNvPr id="8" name="Picture 7">
             <a:extLst>
               <a:ext uri="{FF2B5EF4-FFF2-40B4-BE49-F238E27FC236}">
-                <a16:creationId xmlns:a16="http://schemas.microsoft.com/office/drawing/2014/main" id="{A980F6F2-E1AC-8D2F-500D-EB422D3CBC35}"/>
+                <a16:creationId xmlns:a16="http://schemas.microsoft.com/office/drawing/2014/main" id="{982037BC-2B71-7ACA-2330-06FC1741E96C}"/>
               </a:ext>
             </a:extLst>
           </p:cNvPr>
@@ -3640,14 +3749,216 @@
         </p:blipFill>
         <p:spPr>
           <a:xfrm>
-            <a:off x="23813" y="68727"/>
-            <a:ext cx="1056690" cy="970680"/>
+            <a:off x="10765631" y="3571540"/>
+            <a:ext cx="3705224" cy="1983152"/>
+          </a:xfrm>
+          <a:prstGeom prst="rect">
+            <a:avLst/>
+          </a:prstGeom>
+          <a:ln w="38100">
+            <a:solidFill>
+              <a:srgbClr val="00B050"/>
+            </a:solidFill>
+          </a:ln>
+        </p:spPr>
+      </p:pic>
+      <p:pic>
+        <p:nvPicPr>
+          <p:cNvPr id="9" name="Picture 8">
+            <a:extLst>
+              <a:ext uri="{FF2B5EF4-FFF2-40B4-BE49-F238E27FC236}">
+                <a16:creationId xmlns:a16="http://schemas.microsoft.com/office/drawing/2014/main" id="{152E7FE2-408E-F46E-196E-E9EDE5F71A2B}"/>
+              </a:ext>
+            </a:extLst>
+          </p:cNvPr>
+          <p:cNvPicPr>
+            <a:picLocks noChangeAspect="1"/>
+          </p:cNvPicPr>
+          <p:nvPr/>
+        </p:nvPicPr>
+        <p:blipFill>
+          <a:blip r:embed="rId7"/>
+          <a:stretch>
+            <a:fillRect/>
+          </a:stretch>
+        </p:blipFill>
+        <p:spPr>
+          <a:xfrm>
+            <a:off x="7671084" y="7788025"/>
+            <a:ext cx="6799771" cy="2072564"/>
           </a:xfrm>
           <a:prstGeom prst="rect">
             <a:avLst/>
           </a:prstGeom>
         </p:spPr>
       </p:pic>
+      <p:sp>
+        <p:nvSpPr>
+          <p:cNvPr id="10" name="TextBox 9">
+            <a:extLst>
+              <a:ext uri="{FF2B5EF4-FFF2-40B4-BE49-F238E27FC236}">
+                <a16:creationId xmlns:a16="http://schemas.microsoft.com/office/drawing/2014/main" id="{C09DCEEB-6E0B-A28B-587D-5CF139DFE960}"/>
+              </a:ext>
+            </a:extLst>
+          </p:cNvPr>
+          <p:cNvSpPr txBox="1"/>
+          <p:nvPr/>
+        </p:nvSpPr>
+        <p:spPr>
+          <a:xfrm>
+            <a:off x="10765631" y="5756509"/>
+            <a:ext cx="2375971" cy="2800767"/>
+          </a:xfrm>
+          <a:prstGeom prst="rect">
+            <a:avLst/>
+          </a:prstGeom>
+          <a:noFill/>
+        </p:spPr>
+        <p:txBody>
+          <a:bodyPr wrap="none" rtlCol="0">
+            <a:spAutoFit/>
+          </a:bodyPr>
+          <a:lstStyle/>
+          <a:p>
+            <a:r>
+              <a:rPr lang="en-US" sz="1400" b="1" dirty="0">
+                <a:latin typeface="Helvetica Neue" charset="0"/>
+                <a:cs typeface="Helvetica Neue" charset="0"/>
+              </a:rPr>
+              <a:t>Reliable Operation:</a:t>
+            </a:r>
+          </a:p>
+          <a:p>
+            <a:pPr marL="285750" indent="-285750">
+              <a:buFont typeface="Arial" panose="020B0604020202020204" pitchFamily="34" charset="0"/>
+              <a:buChar char="•"/>
+            </a:pPr>
+            <a:r>
+              <a:rPr lang="en-US" sz="1200" dirty="0">
+                <a:latin typeface="Helvetica Neue" charset="0"/>
+                <a:cs typeface="Helvetica Neue" charset="0"/>
+              </a:rPr>
+              <a:t>Stale Entry Reaper</a:t>
+            </a:r>
+          </a:p>
+          <a:p>
+            <a:pPr marL="285750" indent="-285750">
+              <a:buFont typeface="Arial" panose="020B0604020202020204" pitchFamily="34" charset="0"/>
+              <a:buChar char="•"/>
+            </a:pPr>
+            <a:r>
+              <a:rPr lang="en-US" sz="1200" dirty="0">
+                <a:latin typeface="Helvetica Neue" charset="0"/>
+                <a:cs typeface="Helvetica Neue" charset="0"/>
+              </a:rPr>
+              <a:t>Inbuilt data Source tracking </a:t>
+            </a:r>
+          </a:p>
+          <a:p>
+            <a:pPr marL="285750" indent="-285750">
+              <a:buFont typeface="Arial" panose="020B0604020202020204" pitchFamily="34" charset="0"/>
+              <a:buChar char="•"/>
+            </a:pPr>
+            <a:r>
+              <a:rPr lang="en-US" sz="1200" dirty="0">
+                <a:latin typeface="Helvetica Neue" charset="0"/>
+                <a:cs typeface="Helvetica Neue" charset="0"/>
+              </a:rPr>
+              <a:t>BLE Auto-Reconnect</a:t>
+            </a:r>
+          </a:p>
+          <a:p>
+            <a:endParaRPr lang="en-US" sz="1200" b="1" dirty="0">
+              <a:latin typeface="Helvetica Neue" charset="0"/>
+              <a:cs typeface="Helvetica Neue" charset="0"/>
+            </a:endParaRPr>
+          </a:p>
+          <a:p>
+            <a:r>
+              <a:rPr lang="en-US" sz="1400" b="1" dirty="0">
+                <a:latin typeface="Helvetica Neue" charset="0"/>
+                <a:cs typeface="Helvetica Neue" charset="0"/>
+              </a:rPr>
+              <a:t>Sensing and Actuation</a:t>
+            </a:r>
+          </a:p>
+          <a:p>
+            <a:pPr marL="285750" indent="-285750">
+              <a:buFont typeface="Arial" panose="020B0604020202020204" pitchFamily="34" charset="0"/>
+              <a:buChar char="•"/>
+            </a:pPr>
+            <a:r>
+              <a:rPr lang="en-US" sz="1200" dirty="0">
+                <a:latin typeface="Helvetica Neue" charset="0"/>
+                <a:cs typeface="Helvetica Neue" charset="0"/>
+              </a:rPr>
+              <a:t>PC GUIs</a:t>
+            </a:r>
+          </a:p>
+          <a:p>
+            <a:pPr marL="285750" indent="-285750">
+              <a:buFont typeface="Arial" panose="020B0604020202020204" pitchFamily="34" charset="0"/>
+              <a:buChar char="•"/>
+            </a:pPr>
+            <a:r>
+              <a:rPr lang="en-US" sz="1200" dirty="0">
+                <a:latin typeface="Helvetica Neue" charset="0"/>
+                <a:cs typeface="Helvetica Neue" charset="0"/>
+              </a:rPr>
+              <a:t>RGB LEDs</a:t>
+            </a:r>
+          </a:p>
+          <a:p>
+            <a:pPr marL="285750" indent="-285750">
+              <a:buFont typeface="Arial" panose="020B0604020202020204" pitchFamily="34" charset="0"/>
+              <a:buChar char="•"/>
+            </a:pPr>
+            <a:r>
+              <a:rPr lang="en-US" sz="1200" dirty="0">
+                <a:latin typeface="Helvetica Neue" charset="0"/>
+                <a:cs typeface="Helvetica Neue" charset="0"/>
+              </a:rPr>
+              <a:t>SDR ADS-B RX</a:t>
+            </a:r>
+          </a:p>
+          <a:p>
+            <a:pPr marL="285750" indent="-285750">
+              <a:buFont typeface="Arial" panose="020B0604020202020204" pitchFamily="34" charset="0"/>
+              <a:buChar char="•"/>
+            </a:pPr>
+            <a:r>
+              <a:rPr lang="en-US" sz="1200" dirty="0">
+                <a:latin typeface="Helvetica Neue" charset="0"/>
+                <a:cs typeface="Helvetica Neue" charset="0"/>
+              </a:rPr>
+              <a:t>BLE Radio TX/RX</a:t>
+            </a:r>
+          </a:p>
+          <a:p>
+            <a:pPr marL="285750" indent="-285750">
+              <a:buFont typeface="Arial" panose="020B0604020202020204" pitchFamily="34" charset="0"/>
+              <a:buChar char="•"/>
+            </a:pPr>
+            <a:endParaRPr lang="en-US" sz="1200" b="1" dirty="0">
+              <a:latin typeface="Helvetica Neue" charset="0"/>
+              <a:cs typeface="Helvetica Neue" charset="0"/>
+            </a:endParaRPr>
+          </a:p>
+          <a:p>
+            <a:pPr marL="285750" indent="-285750">
+              <a:buFont typeface="Arial" panose="020B0604020202020204" pitchFamily="34" charset="0"/>
+              <a:buChar char="•"/>
+            </a:pPr>
+            <a:endParaRPr lang="en-US" sz="1200" b="1" dirty="0">
+              <a:latin typeface="Helvetica Neue" charset="0"/>
+              <a:cs typeface="Helvetica Neue" charset="0"/>
+            </a:endParaRPr>
+          </a:p>
+          <a:p>
+            <a:endParaRPr lang="en-AU" dirty="0"/>
+          </a:p>
+        </p:txBody>
+      </p:sp>
     </p:spTree>
   </p:cSld>
   <p:clrMapOvr>

--- a/POSTER_FINAL_PROJECT.pptx
+++ b/POSTER_FINAL_PROJECT.pptx
@@ -156,6 +156,59 @@
 </p:presentation>
 </file>
 
+<file path=ppt/revisionInfo.xml><?xml version="1.0" encoding="utf-8"?>
+<p1510:revInfo xmlns:a="http://schemas.openxmlformats.org/drawingml/2006/main" xmlns:r="http://schemas.openxmlformats.org/officeDocument/2006/relationships" xmlns:p1510="http://schemas.microsoft.com/office/powerpoint/2015/10/main">
+  <p1510:revLst>
+    <p1510:client id="{32336F64-FF99-4819-AC86-696056F23AB2}" v="6" dt="2026-05-25T03:54:22.936"/>
+  </p1510:revLst>
+</p1510:revInfo>
+</file>
+
+<file path=ppt/changesInfos/changesInfo1.xml><?xml version="1.0" encoding="utf-8"?>
+<pc:chgInfo xmlns:a="http://schemas.openxmlformats.org/drawingml/2006/main" xmlns:r="http://schemas.openxmlformats.org/officeDocument/2006/relationships" xmlns:ac="http://schemas.microsoft.com/office/drawing/2013/main/command" xmlns:pc="http://schemas.microsoft.com/office/powerpoint/2013/main/command">
+  <pc:docChgLst>
+    <pc:chgData name="Will Wrenn" userId="f56d42fdb79696f3" providerId="LiveId" clId="{8848588F-0436-4B70-AC11-6831CFA9E1F4}"/>
+    <pc:docChg chg="undo custSel modSld">
+      <pc:chgData name="Will Wrenn" userId="f56d42fdb79696f3" providerId="LiveId" clId="{8848588F-0436-4B70-AC11-6831CFA9E1F4}" dt="2026-05-25T03:54:33.770" v="36" actId="404"/>
+      <pc:docMkLst>
+        <pc:docMk/>
+      </pc:docMkLst>
+      <pc:sldChg chg="addSp delSp modSp mod">
+        <pc:chgData name="Will Wrenn" userId="f56d42fdb79696f3" providerId="LiveId" clId="{8848588F-0436-4B70-AC11-6831CFA9E1F4}" dt="2026-05-25T03:54:33.770" v="36" actId="404"/>
+        <pc:sldMkLst>
+          <pc:docMk/>
+          <pc:sldMk cId="0" sldId="257"/>
+        </pc:sldMkLst>
+        <pc:spChg chg="mod">
+          <ac:chgData name="Will Wrenn" userId="f56d42fdb79696f3" providerId="LiveId" clId="{8848588F-0436-4B70-AC11-6831CFA9E1F4}" dt="2026-05-25T03:54:33.770" v="36" actId="404"/>
+          <ac:spMkLst>
+            <pc:docMk/>
+            <pc:sldMk cId="0" sldId="257"/>
+            <ac:spMk id="3077" creationId="{00000000-0000-0000-0000-000000000000}"/>
+          </ac:spMkLst>
+        </pc:spChg>
+        <pc:picChg chg="add del mod">
+          <ac:chgData name="Will Wrenn" userId="f56d42fdb79696f3" providerId="LiveId" clId="{8848588F-0436-4B70-AC11-6831CFA9E1F4}" dt="2026-05-25T03:47:53.652" v="3" actId="478"/>
+          <ac:picMkLst>
+            <pc:docMk/>
+            <pc:sldMk cId="0" sldId="257"/>
+            <ac:picMk id="2" creationId="{146A5373-1698-F7EF-2BD0-27FF08C029F2}"/>
+          </ac:picMkLst>
+        </pc:picChg>
+        <pc:picChg chg="mod">
+          <ac:chgData name="Will Wrenn" userId="f56d42fdb79696f3" providerId="LiveId" clId="{8848588F-0436-4B70-AC11-6831CFA9E1F4}" dt="2026-05-25T03:48:03.947" v="5" actId="2085"/>
+          <ac:picMkLst>
+            <pc:docMk/>
+            <pc:sldMk cId="0" sldId="257"/>
+            <ac:picMk id="8" creationId="{982037BC-2B71-7ACA-2330-06FC1741E96C}"/>
+          </ac:picMkLst>
+        </pc:picChg>
+      </pc:sldChg>
+    </pc:docChg>
+  </pc:docChgLst>
+</pc:chgInfo>
+</file>
+
 <file path=ppt/notesMasters/notesMaster1.xml><?xml version="1.0" encoding="utf-8"?>
 <p:notesMaster xmlns:a="http://schemas.openxmlformats.org/drawingml/2006/main" xmlns:r="http://schemas.openxmlformats.org/officeDocument/2006/relationships" xmlns:p="http://schemas.openxmlformats.org/presentationml/2006/main">
   <p:cSld>
@@ -253,7 +306,7 @@
               <a:pPr>
                 <a:defRPr/>
               </a:pPr>
-              <a:t>5/23/2026</a:t>
+              <a:t>5/25/2026</a:t>
             </a:fld>
             <a:endParaRPr lang="en-US"/>
           </a:p>
@@ -853,7 +906,7 @@
               <a:pPr>
                 <a:defRPr/>
               </a:pPr>
-              <a:t>5/23/2026</a:t>
+              <a:t>5/25/2026</a:t>
             </a:fld>
             <a:endParaRPr lang="en-US"/>
           </a:p>
@@ -1825,7 +1878,7 @@
               <a:pPr>
                 <a:defRPr/>
               </a:pPr>
-              <a:t>5/23/2026</a:t>
+              <a:t>5/25/2026</a:t>
             </a:fld>
             <a:endParaRPr lang="en-US"/>
           </a:p>
@@ -2426,43 +2479,18 @@
           </a:p>
           <a:p>
             <a:r>
-              <a:rPr lang="en-US" sz="1200" dirty="0">
-                <a:latin typeface="Helvetica Neue" charset="0"/>
-                <a:cs typeface="Helvetica Neue" charset="0"/>
-              </a:rPr>
-              <a:t>Small UAV operators that exist in uncontrolled airspaces have no affordable ways to detect potential collisions with manned ADS-B-equipped aircraft.</a:t>
-            </a:r>
-          </a:p>
-          <a:p>
-            <a:r>
-              <a:rPr lang="en-US" sz="1200" dirty="0">
-                <a:latin typeface="Helvetica Neue" charset="0"/>
-                <a:cs typeface="Helvetica Neue" charset="0"/>
-              </a:rPr>
-              <a:t>Existing ADS-B receiver displays surrounding traffic but cannot combine a non-transponder drones own position into conflict prediction, leaving a critical gap. This system closes that gap.</a:t>
-            </a:r>
-          </a:p>
-          <a:p>
-            <a:r>
-              <a:rPr lang="en-US" sz="1200" dirty="0">
-                <a:latin typeface="Helvetica Neue" charset="0"/>
-                <a:cs typeface="Helvetica Neue" charset="0"/>
-              </a:rPr>
-              <a:t>It combines the real ADS-B aircraft and a simulated BLE-telemetry drone which will simulate a real UAV operation and can be scaled to real world use.</a:t>
-            </a:r>
-          </a:p>
-          <a:p>
-            <a:r>
-              <a:rPr lang="en-US" sz="1200" dirty="0">
-                <a:latin typeface="Helvetica Neue" charset="0"/>
-                <a:cs typeface="Helvetica Neue" charset="0"/>
-              </a:rPr>
-              <a:t>It is a low-cost ground unit using an SDR, two nRF52840 boards and a Peizo buzzer that delivers air traffic control equivalent to a single operator.</a:t>
-            </a:r>
-            <a:endParaRPr lang="en-US" dirty="0">
-              <a:latin typeface="Helvetica Neue" charset="0"/>
-              <a:cs typeface="Helvetica Neue" charset="0"/>
-            </a:endParaRPr>
+              <a:rPr lang="en-AU" sz="1200" dirty="0"/>
+              <a:t>Small UAV operators flying in uncontrolled airspace have no cheap way to know if a manned aircraft is on a collision course with them. Standard ADS-B receivers show surrounding traffic but have no way to factor in the drone's own position, so conflict detection isn't possible.</a:t>
+            </a:r>
+          </a:p>
+          <a:p>
+            <a:r>
+              <a:rPr lang="en-AU" sz="1200" dirty="0"/>
+              <a:t>Our system solves this by combining live ADS-B traffic with a BLE-transmitting simulated drone on a single conflict predictor. Built from an SDR, two nRF52840 boards and a piezo buzzer, it gives a solo operator real-time collision awareness at a fraction of the cost of existing solutions.</a:t>
+            </a:r>
+          </a:p>
+          <a:p>
+            <a:endParaRPr lang="en-AU" sz="1200" dirty="0"/>
           </a:p>
           <a:p>
             <a:r>
@@ -2508,7 +2536,7 @@
           <a:p>
             <a:r>
               <a:rPr lang="en-AU" sz="1200" dirty="0"/>
-              <a:t>Traffic Controller Board fuses both ADS-B and BLE feeds into a unified Aircraft Database Kalman filter smooths noisy position data and extrapolates future trajectories Collision predictor evaluates all pairwise aircraft conflicts and calculates time-to-closest-approach</a:t>
+              <a:t>Traffic Controller Board fuses both ADS-B and BLE feeds into a unified Aircraft Database Kalman filter smooths noisy position data and estimates future positions of the aircraft. Collision predictor evaluates all pairwise aircraft conflicts and calculates time-to-closest-approach</a:t>
             </a:r>
             <a:endParaRPr lang="en-US" b="1" dirty="0">
               <a:latin typeface="Helvetica Neue" charset="0"/>
@@ -2653,7 +2681,21 @@
                 <a:latin typeface="Helvetica Neue" charset="0"/>
                 <a:cs typeface="Helvetica Neue" charset="0"/>
               </a:rPr>
-              <a:t>Stable 5Hz GATT connection maintained between controller and aircraft node</a:t>
+              <a:t>Stable 5Hz GATT connection, MTU 257 bytes, 38 byte </a:t>
+            </a:r>
+            <a:r>
+              <a:rPr lang="en-US" sz="1200" dirty="0" err="1">
+                <a:latin typeface="Helvetica Neue" charset="0"/>
+                <a:cs typeface="Helvetica Neue" charset="0"/>
+              </a:rPr>
+              <a:t>drame</a:t>
+            </a:r>
+            <a:r>
+              <a:rPr lang="en-US" sz="1200" dirty="0">
+                <a:latin typeface="Helvetica Neue" charset="0"/>
+                <a:cs typeface="Helvetica Neue" charset="0"/>
+              </a:rPr>
+              <a:t>, and remained connected for over 20 mins</a:t>
             </a:r>
           </a:p>
           <a:p>
@@ -2666,7 +2708,7 @@
                 <a:latin typeface="Helvetica Neue" charset="0"/>
                 <a:cs typeface="Helvetica Neue" charset="0"/>
               </a:rPr>
-              <a:t>Auto reconnect performance after drop </a:t>
+              <a:t>Auto reconnect by a 2 second watchdog, with a connection LED.</a:t>
             </a:r>
             <a:endParaRPr lang="en-US" sz="1200" b="1" dirty="0">
               <a:latin typeface="Helvetica Neue" charset="0"/>
@@ -2692,7 +2734,7 @@
                 <a:latin typeface="Helvetica Neue" charset="0"/>
                 <a:cs typeface="Helvetica Neue" charset="0"/>
               </a:rPr>
-              <a:t>Kalman filter accuracy on smoothing noisy position data</a:t>
+              <a:t>Kalman filter accuracy on smoothing noisy position data per aircraft</a:t>
             </a:r>
           </a:p>
           <a:p>
@@ -2701,16 +2743,9 @@
               <a:buChar char="•"/>
             </a:pPr>
             <a:r>
-              <a:rPr lang="en-US" sz="1200" dirty="0">
-                <a:latin typeface="Helvetica Neue" charset="0"/>
-                <a:cs typeface="Helvetica Neue" charset="0"/>
-              </a:rPr>
-              <a:t>Time to closest approach correctly identifying conflict geometry</a:t>
-            </a:r>
-            <a:endParaRPr lang="en-US" sz="1200" b="1" dirty="0">
-              <a:latin typeface="Helvetica Neue" charset="0"/>
-              <a:cs typeface="Helvetica Neue" charset="0"/>
-            </a:endParaRPr>
+              <a:rPr lang="en-AU" sz="1200" dirty="0"/>
+              <a:t>TCA computed pairwise at 5Hz, flags WARNING &lt;500m / &lt;30s, ADVISORY &lt;1000m / &lt;60s </a:t>
+            </a:r>
           </a:p>
           <a:p>
             <a:r>
@@ -2727,11 +2762,8 @@
               <a:buChar char="•"/>
             </a:pPr>
             <a:r>
-              <a:rPr lang="en-US" sz="1200" dirty="0">
-                <a:latin typeface="Helvetica Neue" charset="0"/>
-                <a:cs typeface="Helvetica Neue" charset="0"/>
-              </a:rPr>
-              <a:t>End to end warning delivery - BLE packet, piezo buzzer, GUI alert</a:t>
+              <a:rPr lang="en-AU" sz="1200" dirty="0"/>
+              <a:t>BLE collision packet delivered in ~1–5ms (&lt;200ms spec), re-fired every 3s </a:t>
             </a:r>
           </a:p>
           <a:p>
@@ -2740,16 +2772,17 @@
               <a:buChar char="•"/>
             </a:pPr>
             <a:r>
-              <a:rPr lang="en-US" sz="1200" dirty="0">
-                <a:latin typeface="Helvetica Neue" charset="0"/>
-                <a:cs typeface="Helvetica Neue" charset="0"/>
-              </a:rPr>
-              <a:t>Timestamp logging of collision received and cleared events</a:t>
-            </a:r>
-            <a:endParaRPr lang="en-US" sz="1200" b="1" dirty="0">
-              <a:latin typeface="Helvetica Neue" charset="0"/>
-              <a:cs typeface="Helvetica Neue" charset="0"/>
-            </a:endParaRPr>
+              <a:rPr lang="en-AU" sz="1200" dirty="0"/>
+              <a:t>100% collision history logged via MQTT + </a:t>
+            </a:r>
+            <a:r>
+              <a:rPr lang="en-AU" sz="1200" dirty="0" err="1"/>
+              <a:t>InfluxDB</a:t>
+            </a:r>
+            <a:r>
+              <a:rPr lang="en-AU" sz="1200" dirty="0"/>
+              <a:t>, timestamps</a:t>
+            </a:r>
           </a:p>
           <a:p>
             <a:r>
@@ -2766,11 +2799,8 @@
               <a:buChar char="•"/>
             </a:pPr>
             <a:r>
-              <a:rPr lang="en-US" sz="1200" dirty="0">
-                <a:latin typeface="Helvetica Neue" charset="0"/>
-                <a:cs typeface="Helvetica Neue" charset="0"/>
-              </a:rPr>
-              <a:t>Live GPS tracking on Brisbane map with correct bound</a:t>
+              <a:rPr lang="en-AU" sz="1200" dirty="0"/>
+              <a:t>Live GPS tracking on Brisbane map, 32 aircraft capacity, 2Hz (500ms) refresh</a:t>
             </a:r>
           </a:p>
           <a:p>
@@ -2779,16 +2809,9 @@
               <a:buChar char="•"/>
             </a:pPr>
             <a:r>
-              <a:rPr lang="en-US" sz="1200" dirty="0">
-                <a:latin typeface="Helvetica Neue" charset="0"/>
-                <a:cs typeface="Helvetica Neue" charset="0"/>
-              </a:rPr>
-              <a:t>Collision warning log display with timestamps.</a:t>
-            </a:r>
-            <a:endParaRPr lang="en-US" sz="1200" b="1" dirty="0">
-              <a:latin typeface="Helvetica Neue" charset="0"/>
-              <a:cs typeface="Helvetica Neue" charset="0"/>
-            </a:endParaRPr>
+              <a:rPr lang="en-AU" sz="1200" dirty="0"/>
+              <a:t>Collision warning log displays ADVISORY / WARNING / CRASH events with timestamps</a:t>
+            </a:r>
           </a:p>
           <a:p>
             <a:r>
@@ -2805,11 +2828,8 @@
               <a:buChar char="•"/>
             </a:pPr>
             <a:r>
-              <a:rPr lang="en-US" sz="1200" dirty="0">
-                <a:latin typeface="Helvetica Neue" charset="0"/>
-                <a:cs typeface="Helvetica Neue" charset="0"/>
-              </a:rPr>
-              <a:t>Successful fusion of ADS-B and BLE feeds into single Aircraft Database </a:t>
+              <a:rPr lang="en-AU" sz="1200" dirty="0"/>
+              <a:t>ADS-B (115200 baud UART) and BLE feeds fused into single 32-entry aircraft DB, 10s stale evict </a:t>
             </a:r>
           </a:p>
           <a:p>
@@ -2818,22 +2838,38 @@
               <a:buChar char="•"/>
             </a:pPr>
             <a:r>
-              <a:rPr lang="en-US" sz="1200" dirty="0">
-                <a:latin typeface="Helvetica Neue" charset="0"/>
-                <a:cs typeface="Helvetica Neue" charset="0"/>
-              </a:rPr>
-              <a:t>Both cooperative and non-cooperative aircraft evaluated in same conflict predictor</a:t>
-            </a:r>
-            <a:endParaRPr lang="en-US" b="1" dirty="0">
-              <a:latin typeface="Helvetica Neue" charset="0"/>
-              <a:cs typeface="Helvetica Neue" charset="0"/>
-            </a:endParaRPr>
-          </a:p>
-          <a:p>
-            <a:endParaRPr lang="en-US" b="1" dirty="0">
-              <a:latin typeface="Helvetica Neue" charset="0"/>
-              <a:cs typeface="Helvetica Neue" charset="0"/>
-            </a:endParaRPr>
+              <a:rPr lang="en-AU" sz="1200" dirty="0"/>
+              <a:t>Cooperative (ADS-B) and non-cooperative (BLE-sim) aircraft evaluated in same 5Hz conflict predictor </a:t>
+            </a:r>
+          </a:p>
+          <a:p>
+            <a:r>
+              <a:rPr lang="en-US" b="1" dirty="0">
+                <a:latin typeface="Helvetica Neue" charset="0"/>
+                <a:cs typeface="Helvetica Neue" charset="0"/>
+              </a:rPr>
+              <a:t>SDR Input </a:t>
+            </a:r>
+          </a:p>
+          <a:p>
+            <a:pPr marL="171450" indent="-171450">
+              <a:buFont typeface="Arial" panose="020B0604020202020204" pitchFamily="34" charset="0"/>
+              <a:buChar char="•"/>
+            </a:pPr>
+            <a:r>
+              <a:rPr lang="en-AU" sz="1200" dirty="0"/>
+              <a:t>Dump1090 JSON parsed at 115200 baud</a:t>
+            </a:r>
+          </a:p>
+          <a:p>
+            <a:pPr marL="171450" indent="-171450">
+              <a:buFont typeface="Arial" panose="020B0604020202020204" pitchFamily="34" charset="0"/>
+              <a:buChar char="•"/>
+            </a:pPr>
+            <a:r>
+              <a:rPr lang="en-AU" sz="1200" dirty="0"/>
+              <a:t>32 aircraft max capacity with aircraft removed after 10 seconds of no contact.</a:t>
+            </a:r>
           </a:p>
           <a:p>
             <a:r>
@@ -2854,11 +2890,16 @@
               <a:buChar char="•"/>
             </a:pPr>
             <a:r>
-              <a:rPr lang="en-US" sz="1200" dirty="0">
-                <a:latin typeface="Helvetica Neue" charset="0"/>
-                <a:cs typeface="Helvetica Neue" charset="0"/>
-              </a:rPr>
-              <a:t>Background Image/Logo produced for this poster by Claude.ai</a:t>
+              <a:rPr lang="en-AU" sz="1200" dirty="0"/>
+              <a:t>FlightAware Dump1090 - github.com/</a:t>
+            </a:r>
+            <a:r>
+              <a:rPr lang="en-AU" sz="1200" dirty="0" err="1"/>
+              <a:t>flightaware</a:t>
+            </a:r>
+            <a:r>
+              <a:rPr lang="en-AU" sz="1200" dirty="0"/>
+              <a:t>/dump1090</a:t>
             </a:r>
           </a:p>
           <a:p>
@@ -2867,11 +2908,8 @@
               <a:buChar char="•"/>
             </a:pPr>
             <a:r>
-              <a:rPr lang="en-US" sz="1200" dirty="0">
-                <a:latin typeface="Helvetica Neue" charset="0"/>
-                <a:cs typeface="Helvetica Neue" charset="0"/>
-              </a:rPr>
-              <a:t>.</a:t>
+              <a:rPr lang="en-AU" sz="1200" dirty="0"/>
+              <a:t>Zephyr RTOS Documentation - docs.zephyrproject.org</a:t>
             </a:r>
           </a:p>
           <a:p>
@@ -2880,64 +2918,10 @@
               <a:buChar char="•"/>
             </a:pPr>
             <a:r>
-              <a:rPr lang="en-US" sz="1200" dirty="0">
-                <a:latin typeface="Helvetica Neue" charset="0"/>
-                <a:cs typeface="Helvetica Neue" charset="0"/>
-              </a:rPr>
-              <a:t>.</a:t>
-            </a:r>
-          </a:p>
-          <a:p>
-            <a:pPr marL="285750" indent="-285750">
-              <a:buFont typeface="Arial" panose="020B0604020202020204" pitchFamily="34" charset="0"/>
-              <a:buChar char="•"/>
-            </a:pPr>
-            <a:r>
-              <a:rPr lang="en-US" sz="1200" dirty="0">
-                <a:latin typeface="Helvetica Neue" charset="0"/>
-                <a:cs typeface="Helvetica Neue" charset="0"/>
-              </a:rPr>
-              <a:t>.</a:t>
-            </a:r>
-          </a:p>
-          <a:p>
-            <a:pPr marL="285750" indent="-285750">
-              <a:buFont typeface="Arial" panose="020B0604020202020204" pitchFamily="34" charset="0"/>
-              <a:buChar char="•"/>
-            </a:pPr>
-            <a:r>
-              <a:rPr lang="en-US" sz="1200" dirty="0">
-                <a:latin typeface="Helvetica Neue" charset="0"/>
-                <a:cs typeface="Helvetica Neue" charset="0"/>
-              </a:rPr>
-              <a:t>.</a:t>
-            </a:r>
-          </a:p>
-          <a:p>
-            <a:pPr marL="285750" indent="-285750">
-              <a:buFont typeface="Arial" panose="020B0604020202020204" pitchFamily="34" charset="0"/>
-              <a:buChar char="•"/>
-            </a:pPr>
-            <a:r>
-              <a:rPr lang="en-US" sz="1200" dirty="0">
-                <a:latin typeface="Helvetica Neue" charset="0"/>
-                <a:cs typeface="Helvetica Neue" charset="0"/>
-              </a:rPr>
-              <a:t>.</a:t>
-            </a:r>
-          </a:p>
-          <a:p>
-            <a:pPr marL="285750" indent="-285750">
-              <a:buFont typeface="Arial" panose="020B0604020202020204" pitchFamily="34" charset="0"/>
-              <a:buChar char="•"/>
-            </a:pPr>
+              <a:rPr lang="en-AU" sz="1200" dirty="0"/>
+              <a:t>Nordic Semiconductor nRF52840 Product Specification</a:t>
+            </a:r>
             <a:endParaRPr lang="en-US" sz="1200" dirty="0">
-              <a:latin typeface="Helvetica Neue" charset="0"/>
-              <a:cs typeface="Helvetica Neue" charset="0"/>
-            </a:endParaRPr>
-          </a:p>
-          <a:p>
-            <a:endParaRPr lang="en-US" dirty="0">
               <a:latin typeface="Helvetica Neue" charset="0"/>
               <a:cs typeface="Helvetica Neue" charset="0"/>
             </a:endParaRPr>
@@ -2969,7 +2953,7 @@
         <p:spPr>
           <a:xfrm>
             <a:off x="7466013" y="1270001"/>
-            <a:ext cx="3299618" cy="4252686"/>
+            <a:ext cx="3299618" cy="6518024"/>
           </a:xfrm>
           <a:ln/>
         </p:spPr>
@@ -3664,41 +3648,6 @@
       </p:sp>
       <p:pic>
         <p:nvPicPr>
-          <p:cNvPr id="4" name="Picture 3" descr="The image displays a map with a route from Samford Village to Brisbane Airport, marked with specific latitude and longitude coordinates.&#10;&#10;AI-generated content may be incorrect.">
-            <a:extLst>
-              <a:ext uri="{FF2B5EF4-FFF2-40B4-BE49-F238E27FC236}">
-                <a16:creationId xmlns:a16="http://schemas.microsoft.com/office/drawing/2014/main" id="{0ADC6F1C-1FE4-7E21-A8A9-9BBEC67CC4BA}"/>
-              </a:ext>
-            </a:extLst>
-          </p:cNvPr>
-          <p:cNvPicPr>
-            <a:picLocks noChangeAspect="1"/>
-          </p:cNvPicPr>
-          <p:nvPr/>
-        </p:nvPicPr>
-        <p:blipFill>
-          <a:blip r:embed="rId4"/>
-          <a:stretch>
-            <a:fillRect/>
-          </a:stretch>
-        </p:blipFill>
-        <p:spPr>
-          <a:xfrm>
-            <a:off x="10765631" y="1237995"/>
-            <a:ext cx="3705224" cy="2131728"/>
-          </a:xfrm>
-          <a:prstGeom prst="rect">
-            <a:avLst/>
-          </a:prstGeom>
-          <a:ln w="38100">
-            <a:solidFill>
-              <a:srgbClr val="FF0000"/>
-            </a:solidFill>
-          </a:ln>
-        </p:spPr>
-      </p:pic>
-      <p:pic>
-        <p:nvPicPr>
           <p:cNvPr id="14" name="Picture 13" descr="SW&#10;&#10;AI-generated content may be incorrect.">
             <a:extLst>
               <a:ext uri="{FF2B5EF4-FFF2-40B4-BE49-F238E27FC236}">
@@ -3712,7 +3661,7 @@
           <p:nvPr/>
         </p:nvPicPr>
         <p:blipFill>
-          <a:blip r:embed="rId5"/>
+          <a:blip r:embed="rId4"/>
           <a:stretch>
             <a:fillRect/>
           </a:stretch>
@@ -3742,7 +3691,7 @@
           <p:nvPr/>
         </p:nvPicPr>
         <p:blipFill>
-          <a:blip r:embed="rId6"/>
+          <a:blip r:embed="rId5"/>
           <a:stretch>
             <a:fillRect/>
           </a:stretch>
@@ -3777,7 +3726,7 @@
           <p:nvPr/>
         </p:nvPicPr>
         <p:blipFill>
-          <a:blip r:embed="rId7"/>
+          <a:blip r:embed="rId6"/>
           <a:stretch>
             <a:fillRect/>
           </a:stretch>
@@ -3959,6 +3908,41 @@
           </a:p>
         </p:txBody>
       </p:sp>
+      <p:pic>
+        <p:nvPicPr>
+          <p:cNvPr id="3" name="Picture 2" descr="The image displays a map with a marker on Samford Village near Brisbane Airport, indicating a collision warning and a diversion alert, along with flight data.&#10;&#10;AI-generated content may be incorrect.">
+            <a:extLst>
+              <a:ext uri="{FF2B5EF4-FFF2-40B4-BE49-F238E27FC236}">
+                <a16:creationId xmlns:a16="http://schemas.microsoft.com/office/drawing/2014/main" id="{B27EFAE1-132B-206B-D9AD-C00723EC20C2}"/>
+              </a:ext>
+            </a:extLst>
+          </p:cNvPr>
+          <p:cNvPicPr>
+            <a:picLocks noChangeAspect="1"/>
+          </p:cNvPicPr>
+          <p:nvPr/>
+        </p:nvPicPr>
+        <p:blipFill>
+          <a:blip r:embed="rId7"/>
+          <a:stretch>
+            <a:fillRect/>
+          </a:stretch>
+        </p:blipFill>
+        <p:spPr>
+          <a:xfrm>
+            <a:off x="10765631" y="1248798"/>
+            <a:ext cx="3705224" cy="2221833"/>
+          </a:xfrm>
+          <a:prstGeom prst="rect">
+            <a:avLst/>
+          </a:prstGeom>
+          <a:ln w="38100">
+            <a:solidFill>
+              <a:srgbClr val="FF0000"/>
+            </a:solidFill>
+          </a:ln>
+        </p:spPr>
+      </p:pic>
     </p:spTree>
   </p:cSld>
   <p:clrMapOvr>
